--- a/Project Files/Presentations/Group_8Implementation.pptx
+++ b/Project Files/Presentations/Group_8Implementation.pptx
@@ -252,7 +252,7 @@
           <a:p>
             <a:fld id="{717BC71B-6527-4638-937B-C93EB849CB02}" type="datetimeFigureOut">
               <a:rPr lang="en-US" smtClean="0"/>
-              <a:t>3/16/2025</a:t>
+              <a:t>3/17/2025</a:t>
             </a:fld>
             <a:endParaRPr lang="en-US" dirty="0"/>
           </a:p>
@@ -429,7 +429,7 @@
           <a:p>
             <a:fld id="{425465A2-8C9C-419F-9FD8-234480873777}" type="datetimeFigureOut">
               <a:rPr lang="en-US" smtClean="0"/>
-              <a:t>3/16/2025</a:t>
+              <a:t>3/17/2025</a:t>
             </a:fld>
             <a:endParaRPr lang="en-US" dirty="0"/>
           </a:p>
@@ -4665,7 +4665,7 @@
                 <a16:creationId xmlns:a16="http://schemas.microsoft.com/office/drawing/2014/main" id="{57BF9F63-86BE-5515-AD3C-59481B3FF4B4}"/>
               </a:ext>
               <a:ext uri="{C183D7F6-B498-43B3-948B-1728B52AA6E4}">
-                <adec:decorative xmlns:adec="http://schemas.microsoft.com/office/drawing/2017/decorative" xmlns="" val="1"/>
+                <adec:decorative xmlns="" xmlns:adec="http://schemas.microsoft.com/office/drawing/2017/decorative" val="1"/>
               </a:ext>
             </a:extLst>
           </p:cNvPr>
@@ -4986,7 +4986,7 @@
                 <a16:creationId xmlns:a16="http://schemas.microsoft.com/office/drawing/2014/main" id="{60ABD6E1-FE78-D78B-E80C-09490F5D8D05}"/>
               </a:ext>
               <a:ext uri="{C183D7F6-B498-43B3-948B-1728B52AA6E4}">
-                <adec:decorative xmlns:adec="http://schemas.microsoft.com/office/drawing/2017/decorative" xmlns="" val="1"/>
+                <adec:decorative xmlns="" xmlns:adec="http://schemas.microsoft.com/office/drawing/2017/decorative" val="1"/>
               </a:ext>
             </a:extLst>
           </p:cNvPr>
@@ -5074,7 +5074,7 @@
                 <a16:creationId xmlns:a16="http://schemas.microsoft.com/office/drawing/2014/main" id="{62BB1BCD-5C1C-ED05-D6B4-F92367209BEF}"/>
               </a:ext>
               <a:ext uri="{C183D7F6-B498-43B3-948B-1728B52AA6E4}">
-                <adec:decorative xmlns:adec="http://schemas.microsoft.com/office/drawing/2017/decorative" xmlns="" val="1"/>
+                <adec:decorative xmlns="" xmlns:adec="http://schemas.microsoft.com/office/drawing/2017/decorative" val="1"/>
               </a:ext>
             </a:extLst>
           </p:cNvPr>
@@ -12403,17 +12403,25 @@
           <a:lstStyle/>
           <a:p>
             <a:r>
-              <a:rPr lang="en-US" dirty="0" smtClean="0"/>
+              <a:rPr lang="en-US" dirty="0" smtClean="0">
+                <a:latin typeface="+mn-lt"/>
+              </a:rPr>
               <a:t>Mini-Project</a:t>
             </a:r>
             <a:br>
-              <a:rPr lang="en-US" dirty="0" smtClean="0"/>
+              <a:rPr lang="en-US" dirty="0" smtClean="0">
+                <a:latin typeface="+mn-lt"/>
+              </a:rPr>
             </a:br>
             <a:r>
-              <a:rPr lang="en-US" sz="1600" dirty="0" smtClean="0"/>
+              <a:rPr lang="en-US" sz="1600" dirty="0" smtClean="0">
+                <a:latin typeface="+mn-lt"/>
+              </a:rPr>
               <a:t>CS3PC04</a:t>
             </a:r>
-            <a:endParaRPr lang="en-US" dirty="0"/>
+            <a:endParaRPr lang="en-US" dirty="0">
+              <a:latin typeface="+mn-lt"/>
+            </a:endParaRPr>
           </a:p>
         </p:txBody>
       </p:sp>
@@ -12539,7 +12547,6 @@
               <a:rPr lang="en-US" dirty="0"/>
               <a:t>Of Batch B1</a:t>
             </a:r>
-            <a:endParaRPr lang="en-US" dirty="0"/>
           </a:p>
         </p:txBody>
       </p:sp>
@@ -12669,10 +12676,14 @@
           <a:lstStyle/>
           <a:p>
             <a:r>
-              <a:rPr lang="en-US" dirty="0" smtClean="0"/>
+              <a:rPr lang="en-US" dirty="0" smtClean="0">
+                <a:latin typeface="+mn-lt"/>
+              </a:rPr>
               <a:t>Code: Sleep Analysis Model (Overview)</a:t>
             </a:r>
-            <a:endParaRPr lang="en-US" dirty="0"/>
+            <a:endParaRPr lang="en-US" dirty="0">
+              <a:latin typeface="+mn-lt"/>
+            </a:endParaRPr>
           </a:p>
         </p:txBody>
       </p:sp>
@@ -12905,10 +12916,14 @@
           <a:lstStyle/>
           <a:p>
             <a:r>
-              <a:rPr lang="en-US" dirty="0" smtClean="0"/>
+              <a:rPr lang="en-US" dirty="0" smtClean="0">
+                <a:latin typeface="+mn-lt"/>
+              </a:rPr>
               <a:t>Code: Sleep Analysis Model (Overview)</a:t>
             </a:r>
-            <a:endParaRPr lang="en-US" dirty="0"/>
+            <a:endParaRPr lang="en-US" dirty="0">
+              <a:latin typeface="+mn-lt"/>
+            </a:endParaRPr>
           </a:p>
         </p:txBody>
       </p:sp>
@@ -13141,10 +13156,14 @@
           <a:lstStyle/>
           <a:p>
             <a:r>
-              <a:rPr lang="en-US" dirty="0" smtClean="0"/>
+              <a:rPr lang="en-US" dirty="0" smtClean="0">
+                <a:latin typeface="+mn-lt"/>
+              </a:rPr>
               <a:t>Code: Sleep Analysis Model (Overview)</a:t>
             </a:r>
-            <a:endParaRPr lang="en-US" dirty="0"/>
+            <a:endParaRPr lang="en-US" dirty="0">
+              <a:latin typeface="+mn-lt"/>
+            </a:endParaRPr>
           </a:p>
         </p:txBody>
       </p:sp>
@@ -13239,10 +13258,14 @@
           <a:lstStyle/>
           <a:p>
             <a:r>
-              <a:rPr lang="en-US" dirty="0" smtClean="0"/>
+              <a:rPr lang="en-US" dirty="0" smtClean="0">
+                <a:latin typeface="+mn-lt"/>
+              </a:rPr>
               <a:t>Code: Sleep Analysis Model (Overview)</a:t>
             </a:r>
-            <a:endParaRPr lang="en-US" dirty="0"/>
+            <a:endParaRPr lang="en-US" dirty="0">
+              <a:latin typeface="+mn-lt"/>
+            </a:endParaRPr>
           </a:p>
         </p:txBody>
       </p:sp>
@@ -13337,10 +13360,14 @@
           <a:lstStyle/>
           <a:p>
             <a:r>
-              <a:rPr lang="en-US" dirty="0" smtClean="0"/>
+              <a:rPr lang="en-US" dirty="0" smtClean="0">
+                <a:latin typeface="+mn-lt"/>
+              </a:rPr>
               <a:t>Code: Sleep Analysis Model (Overview)</a:t>
             </a:r>
-            <a:endParaRPr lang="en-US" dirty="0"/>
+            <a:endParaRPr lang="en-US" dirty="0">
+              <a:latin typeface="+mn-lt"/>
+            </a:endParaRPr>
           </a:p>
         </p:txBody>
       </p:sp>
@@ -13435,10 +13462,14 @@
           <a:lstStyle/>
           <a:p>
             <a:r>
-              <a:rPr lang="en-US" dirty="0" smtClean="0"/>
+              <a:rPr lang="en-US" dirty="0" smtClean="0">
+                <a:latin typeface="+mn-lt"/>
+              </a:rPr>
               <a:t>Code: Sleep Analysis Model (Overview)</a:t>
             </a:r>
-            <a:endParaRPr lang="en-US" dirty="0"/>
+            <a:endParaRPr lang="en-US" dirty="0">
+              <a:latin typeface="+mn-lt"/>
+            </a:endParaRPr>
           </a:p>
         </p:txBody>
       </p:sp>
@@ -13579,10 +13610,14 @@
           <a:lstStyle/>
           <a:p>
             <a:r>
-              <a:rPr lang="en-US" dirty="0" smtClean="0"/>
+              <a:rPr lang="en-US" dirty="0" smtClean="0">
+                <a:latin typeface="+mn-lt"/>
+              </a:rPr>
               <a:t>UI Design using PyQt5</a:t>
             </a:r>
-            <a:endParaRPr lang="en-US" dirty="0"/>
+            <a:endParaRPr lang="en-US" dirty="0">
+              <a:latin typeface="+mn-lt"/>
+            </a:endParaRPr>
           </a:p>
         </p:txBody>
       </p:sp>
@@ -13653,10 +13688,14 @@
           <a:lstStyle/>
           <a:p>
             <a:r>
-              <a:rPr lang="en-US" dirty="0" smtClean="0"/>
+              <a:rPr lang="en-US" dirty="0" smtClean="0">
+                <a:latin typeface="+mn-lt"/>
+              </a:rPr>
               <a:t>Code: UI Design by PyQt5 (Overview)</a:t>
             </a:r>
-            <a:endParaRPr lang="en-US" dirty="0"/>
+            <a:endParaRPr lang="en-US" dirty="0">
+              <a:latin typeface="+mn-lt"/>
+            </a:endParaRPr>
           </a:p>
         </p:txBody>
       </p:sp>
@@ -13775,10 +13814,14 @@
           <a:lstStyle/>
           <a:p>
             <a:r>
-              <a:rPr lang="en-US" dirty="0" smtClean="0"/>
+              <a:rPr lang="en-US" dirty="0" smtClean="0">
+                <a:latin typeface="+mn-lt"/>
+              </a:rPr>
               <a:t>Code: UI Design by PyQt5 (Overview)</a:t>
             </a:r>
-            <a:endParaRPr lang="en-US" dirty="0"/>
+            <a:endParaRPr lang="en-US" dirty="0">
+              <a:latin typeface="+mn-lt"/>
+            </a:endParaRPr>
           </a:p>
         </p:txBody>
       </p:sp>
@@ -13873,10 +13916,14 @@
           <a:lstStyle/>
           <a:p>
             <a:r>
-              <a:rPr lang="en-US" dirty="0" smtClean="0"/>
+              <a:rPr lang="en-US" dirty="0" smtClean="0">
+                <a:latin typeface="+mn-lt"/>
+              </a:rPr>
               <a:t>Code: UI Design by PyQt5 (Overview)</a:t>
             </a:r>
-            <a:endParaRPr lang="en-US" dirty="0"/>
+            <a:endParaRPr lang="en-US" dirty="0">
+              <a:latin typeface="+mn-lt"/>
+            </a:endParaRPr>
           </a:p>
         </p:txBody>
       </p:sp>
@@ -13965,10 +14012,14 @@
           <a:lstStyle/>
           <a:p>
             <a:r>
-              <a:rPr lang="en-US" dirty="0" smtClean="0"/>
+              <a:rPr lang="en-US" dirty="0" smtClean="0">
+                <a:latin typeface="+mn-lt"/>
+              </a:rPr>
               <a:t>Implementation of Smart Vitality Tracker with AI</a:t>
             </a:r>
-            <a:endParaRPr lang="en-US" dirty="0"/>
+            <a:endParaRPr lang="en-US" dirty="0">
+              <a:latin typeface="+mn-lt"/>
+            </a:endParaRPr>
           </a:p>
         </p:txBody>
       </p:sp>
@@ -14068,10 +14119,14 @@
           <a:lstStyle/>
           <a:p>
             <a:r>
-              <a:rPr lang="en-US" dirty="0" smtClean="0"/>
+              <a:rPr lang="en-US" dirty="0" smtClean="0">
+                <a:latin typeface="+mn-lt"/>
+              </a:rPr>
               <a:t>Code: UI Design by PyQt5 (Overview)</a:t>
             </a:r>
-            <a:endParaRPr lang="en-US" dirty="0"/>
+            <a:endParaRPr lang="en-US" dirty="0">
+              <a:latin typeface="+mn-lt"/>
+            </a:endParaRPr>
           </a:p>
         </p:txBody>
       </p:sp>
@@ -14166,10 +14221,14 @@
           <a:lstStyle/>
           <a:p>
             <a:r>
-              <a:rPr lang="en-US" dirty="0" smtClean="0"/>
+              <a:rPr lang="en-US" dirty="0" smtClean="0">
+                <a:latin typeface="+mn-lt"/>
+              </a:rPr>
               <a:t>Code: UI Design by PyQt5 (Overview)</a:t>
             </a:r>
-            <a:endParaRPr lang="en-US" dirty="0"/>
+            <a:endParaRPr lang="en-US" dirty="0">
+              <a:latin typeface="+mn-lt"/>
+            </a:endParaRPr>
           </a:p>
         </p:txBody>
       </p:sp>
@@ -14264,10 +14323,14 @@
           <a:lstStyle/>
           <a:p>
             <a:r>
-              <a:rPr lang="en-US" dirty="0" smtClean="0"/>
+              <a:rPr lang="en-US" dirty="0" smtClean="0">
+                <a:latin typeface="+mn-lt"/>
+              </a:rPr>
               <a:t>Code: UI Design by PyQt5 (Overview)</a:t>
             </a:r>
-            <a:endParaRPr lang="en-US" dirty="0"/>
+            <a:endParaRPr lang="en-US" dirty="0">
+              <a:latin typeface="+mn-lt"/>
+            </a:endParaRPr>
           </a:p>
         </p:txBody>
       </p:sp>
@@ -14362,10 +14425,14 @@
           <a:lstStyle/>
           <a:p>
             <a:r>
-              <a:rPr lang="en-US" dirty="0" smtClean="0"/>
+              <a:rPr lang="en-US" dirty="0" smtClean="0">
+                <a:latin typeface="+mn-lt"/>
+              </a:rPr>
               <a:t>Code: UI Design by PyQt5 (Overview)</a:t>
             </a:r>
-            <a:endParaRPr lang="en-US" dirty="0"/>
+            <a:endParaRPr lang="en-US" dirty="0">
+              <a:latin typeface="+mn-lt"/>
+            </a:endParaRPr>
           </a:p>
         </p:txBody>
       </p:sp>
@@ -14460,10 +14527,14 @@
           <a:lstStyle/>
           <a:p>
             <a:r>
-              <a:rPr lang="en-US" dirty="0" smtClean="0"/>
+              <a:rPr lang="en-US" dirty="0" smtClean="0">
+                <a:latin typeface="+mn-lt"/>
+              </a:rPr>
               <a:t>Execution of the Code</a:t>
             </a:r>
-            <a:endParaRPr lang="en-US" dirty="0"/>
+            <a:endParaRPr lang="en-US" dirty="0">
+              <a:latin typeface="+mn-lt"/>
+            </a:endParaRPr>
           </a:p>
         </p:txBody>
       </p:sp>
@@ -14558,10 +14629,14 @@
           <a:lstStyle/>
           <a:p>
             <a:r>
-              <a:rPr lang="en-US" dirty="0" smtClean="0"/>
+              <a:rPr lang="en-US" dirty="0" smtClean="0">
+                <a:latin typeface="+mn-lt"/>
+              </a:rPr>
               <a:t>Execution of the Code</a:t>
             </a:r>
-            <a:endParaRPr lang="en-US" dirty="0"/>
+            <a:endParaRPr lang="en-US" dirty="0">
+              <a:latin typeface="+mn-lt"/>
+            </a:endParaRPr>
           </a:p>
         </p:txBody>
       </p:sp>
@@ -14656,10 +14731,14 @@
           <a:lstStyle/>
           <a:p>
             <a:r>
-              <a:rPr lang="en-US" dirty="0" smtClean="0"/>
+              <a:rPr lang="en-US" dirty="0" smtClean="0">
+                <a:latin typeface="+mn-lt"/>
+              </a:rPr>
               <a:t>Execution of the Code</a:t>
             </a:r>
-            <a:endParaRPr lang="en-US" dirty="0"/>
+            <a:endParaRPr lang="en-US" dirty="0">
+              <a:latin typeface="+mn-lt"/>
+            </a:endParaRPr>
           </a:p>
         </p:txBody>
       </p:sp>
@@ -14838,10 +14917,14 @@
           <a:lstStyle/>
           <a:p>
             <a:r>
-              <a:rPr lang="en-US" dirty="0" smtClean="0"/>
+              <a:rPr lang="en-US" dirty="0" smtClean="0">
+                <a:latin typeface="+mn-lt"/>
+              </a:rPr>
               <a:t>Execution of the Code</a:t>
             </a:r>
-            <a:endParaRPr lang="en-US" dirty="0"/>
+            <a:endParaRPr lang="en-US" dirty="0">
+              <a:latin typeface="+mn-lt"/>
+            </a:endParaRPr>
           </a:p>
         </p:txBody>
       </p:sp>
@@ -14936,10 +15019,14 @@
           <a:lstStyle/>
           <a:p>
             <a:r>
-              <a:rPr lang="en-US" dirty="0" smtClean="0"/>
+              <a:rPr lang="en-US" dirty="0" smtClean="0">
+                <a:latin typeface="+mn-lt"/>
+              </a:rPr>
               <a:t>Technologies</a:t>
             </a:r>
-            <a:endParaRPr lang="en-US" dirty="0"/>
+            <a:endParaRPr lang="en-US" dirty="0">
+              <a:latin typeface="+mn-lt"/>
+            </a:endParaRPr>
           </a:p>
         </p:txBody>
       </p:sp>
@@ -15311,10 +15398,14 @@
           <a:lstStyle/>
           <a:p>
             <a:r>
-              <a:rPr lang="en-US" dirty="0" smtClean="0"/>
+              <a:rPr lang="en-US" dirty="0" smtClean="0">
+                <a:latin typeface="+mn-lt"/>
+              </a:rPr>
               <a:t>Code: Dataset Sample (Sleep Efficiency)</a:t>
             </a:r>
-            <a:endParaRPr lang="en-US" dirty="0"/>
+            <a:endParaRPr lang="en-US" dirty="0">
+              <a:latin typeface="+mn-lt"/>
+            </a:endParaRPr>
           </a:p>
         </p:txBody>
       </p:sp>
@@ -18487,10 +18578,14 @@
           <a:lstStyle/>
           <a:p>
             <a:r>
-              <a:rPr lang="en-US" dirty="0" smtClean="0"/>
+              <a:rPr lang="en-US" dirty="0" smtClean="0">
+                <a:latin typeface="+mn-lt"/>
+              </a:rPr>
               <a:t>Code: Sleep Analysis Model (Overview)</a:t>
             </a:r>
-            <a:endParaRPr lang="en-US" dirty="0"/>
+            <a:endParaRPr lang="en-US" dirty="0">
+              <a:latin typeface="+mn-lt"/>
+            </a:endParaRPr>
           </a:p>
         </p:txBody>
       </p:sp>
@@ -18769,10 +18864,14 @@
           <a:lstStyle/>
           <a:p>
             <a:r>
-              <a:rPr lang="en-US" dirty="0" smtClean="0"/>
+              <a:rPr lang="en-US" dirty="0" smtClean="0">
+                <a:latin typeface="+mn-lt"/>
+              </a:rPr>
               <a:t>Code: Sleep Analysis Model (Overview)</a:t>
             </a:r>
-            <a:endParaRPr lang="en-US" dirty="0"/>
+            <a:endParaRPr lang="en-US" dirty="0">
+              <a:latin typeface="+mn-lt"/>
+            </a:endParaRPr>
           </a:p>
         </p:txBody>
       </p:sp>
@@ -19005,10 +19104,14 @@
           <a:lstStyle/>
           <a:p>
             <a:r>
-              <a:rPr lang="en-US" dirty="0" smtClean="0"/>
+              <a:rPr lang="en-US" dirty="0" smtClean="0">
+                <a:latin typeface="+mn-lt"/>
+              </a:rPr>
               <a:t>Code: Sleep Analysis Model (Overview)</a:t>
             </a:r>
-            <a:endParaRPr lang="en-US" dirty="0"/>
+            <a:endParaRPr lang="en-US" dirty="0">
+              <a:latin typeface="+mn-lt"/>
+            </a:endParaRPr>
           </a:p>
         </p:txBody>
       </p:sp>
@@ -19241,10 +19344,14 @@
           <a:lstStyle/>
           <a:p>
             <a:r>
-              <a:rPr lang="en-US" dirty="0" smtClean="0"/>
+              <a:rPr lang="en-US" dirty="0" smtClean="0">
+                <a:latin typeface="+mn-lt"/>
+              </a:rPr>
               <a:t>Code: Sleep Analysis Model (Overview)</a:t>
             </a:r>
-            <a:endParaRPr lang="en-US" dirty="0"/>
+            <a:endParaRPr lang="en-US" dirty="0">
+              <a:latin typeface="+mn-lt"/>
+            </a:endParaRPr>
           </a:p>
         </p:txBody>
       </p:sp>
@@ -19477,10 +19584,14 @@
           <a:lstStyle/>
           <a:p>
             <a:r>
-              <a:rPr lang="en-US" dirty="0" smtClean="0"/>
+              <a:rPr lang="en-US" dirty="0" smtClean="0">
+                <a:latin typeface="+mn-lt"/>
+              </a:rPr>
               <a:t>Code: Sleep Analysis Model (Overview)</a:t>
             </a:r>
-            <a:endParaRPr lang="en-US" dirty="0"/>
+            <a:endParaRPr lang="en-US" dirty="0">
+              <a:latin typeface="+mn-lt"/>
+            </a:endParaRPr>
           </a:p>
         </p:txBody>
       </p:sp>
@@ -20458,6 +20569,26 @@
 </file>
 
 <file path=customXml/item1.xml><?xml version="1.0" encoding="utf-8"?>
+<p:properties xmlns:p="http://schemas.microsoft.com/office/2006/metadata/properties" xmlns:xsi="http://www.w3.org/2001/XMLSchema-instance" xmlns:pc="http://schemas.microsoft.com/office/infopath/2007/PartnerControls">
+  <documentManagement>
+    <_ip_UnifiedCompliancePolicyUIAction xmlns="http://schemas.microsoft.com/sharepoint/v3" xsi:nil="true"/>
+    <Image xmlns="71af3243-3dd4-4a8d-8c0d-dd76da1f02a5">
+      <Url xsi:nil="true"/>
+      <Description xsi:nil="true"/>
+    </Image>
+    <Status xmlns="71af3243-3dd4-4a8d-8c0d-dd76da1f02a5">Not started</Status>
+    <Background xmlns="71af3243-3dd4-4a8d-8c0d-dd76da1f02a5">false</Background>
+    <_ip_UnifiedCompliancePolicyProperties xmlns="http://schemas.microsoft.com/sharepoint/v3" xsi:nil="true"/>
+    <ImageTagsTaxHTField xmlns="71af3243-3dd4-4a8d-8c0d-dd76da1f02a5">
+      <Terms xmlns="http://schemas.microsoft.com/office/infopath/2007/PartnerControls"/>
+    </ImageTagsTaxHTField>
+    <TaxCatchAll xmlns="230e9df3-be65-4c73-a93b-d1236ebd677e" xsi:nil="true"/>
+    <MediaServiceKeyPoints xmlns="71af3243-3dd4-4a8d-8c0d-dd76da1f02a5" xsi:nil="true"/>
+  </documentManagement>
+</p:properties>
+</file>
+
+<file path=customXml/item2.xml><?xml version="1.0" encoding="utf-8"?>
 <ct:contentTypeSchema xmlns:ct="http://schemas.microsoft.com/office/2006/metadata/contentType" xmlns:ma="http://schemas.microsoft.com/office/2006/metadata/properties/metaAttributes" ct:_="" ma:_="" ma:contentTypeName="Document" ma:contentTypeID="0x01010079F111ED35F8CC479449609E8A0923A6" ma:contentTypeVersion="28" ma:contentTypeDescription="Create a new document." ma:contentTypeScope="" ma:versionID="60f5a4f2d2b0abadcf532d48ebf9cb71">
   <xsd:schema xmlns:xsd="http://www.w3.org/2001/XMLSchema" xmlns:xs="http://www.w3.org/2001/XMLSchema" xmlns:p="http://schemas.microsoft.com/office/2006/metadata/properties" xmlns:ns1="http://schemas.microsoft.com/sharepoint/v3" xmlns:ns2="71af3243-3dd4-4a8d-8c0d-dd76da1f02a5" xmlns:ns3="16c05727-aa75-4e4a-9b5f-8a80a1165891" xmlns:ns4="230e9df3-be65-4c73-a93b-d1236ebd677e" targetNamespace="http://schemas.microsoft.com/office/2006/metadata/properties" ma:root="true" ma:fieldsID="7dd78129e6a1811f84807ad11c651531" ns1:_="" ns2:_="" ns3:_="" ns4:_="">
     <xsd:import namespace="http://schemas.microsoft.com/sharepoint/v3"/>
@@ -20769,26 +20900,6 @@
 </ct:contentTypeSchema>
 </file>
 
-<file path=customXml/item2.xml><?xml version="1.0" encoding="utf-8"?>
-<p:properties xmlns:p="http://schemas.microsoft.com/office/2006/metadata/properties" xmlns:xsi="http://www.w3.org/2001/XMLSchema-instance" xmlns:pc="http://schemas.microsoft.com/office/infopath/2007/PartnerControls">
-  <documentManagement>
-    <_ip_UnifiedCompliancePolicyUIAction xmlns="http://schemas.microsoft.com/sharepoint/v3" xsi:nil="true"/>
-    <Image xmlns="71af3243-3dd4-4a8d-8c0d-dd76da1f02a5">
-      <Url xsi:nil="true"/>
-      <Description xsi:nil="true"/>
-    </Image>
-    <Status xmlns="71af3243-3dd4-4a8d-8c0d-dd76da1f02a5">Not started</Status>
-    <Background xmlns="71af3243-3dd4-4a8d-8c0d-dd76da1f02a5">false</Background>
-    <_ip_UnifiedCompliancePolicyProperties xmlns="http://schemas.microsoft.com/sharepoint/v3" xsi:nil="true"/>
-    <ImageTagsTaxHTField xmlns="71af3243-3dd4-4a8d-8c0d-dd76da1f02a5">
-      <Terms xmlns="http://schemas.microsoft.com/office/infopath/2007/PartnerControls"/>
-    </ImageTagsTaxHTField>
-    <TaxCatchAll xmlns="230e9df3-be65-4c73-a93b-d1236ebd677e" xsi:nil="true"/>
-    <MediaServiceKeyPoints xmlns="71af3243-3dd4-4a8d-8c0d-dd76da1f02a5" xsi:nil="true"/>
-  </documentManagement>
-</p:properties>
-</file>
-
 <file path=customXml/item3.xml><?xml version="1.0" encoding="utf-8"?>
 <?mso-contentType ?>
 <FormTemplates xmlns="http://schemas.microsoft.com/sharepoint/v3/contenttype/forms">
@@ -20799,6 +20910,25 @@
 </file>
 
 <file path=customXml/itemProps1.xml><?xml version="1.0" encoding="utf-8"?>
+<ds:datastoreItem xmlns:ds="http://schemas.openxmlformats.org/officeDocument/2006/customXml" ds:itemID="{1F342EE1-43E5-4AFB-895D-B61B9656DC14}">
+  <ds:schemaRefs>
+    <ds:schemaRef ds:uri="http://schemas.microsoft.com/office/2006/documentManagement/types"/>
+    <ds:schemaRef ds:uri="http://schemas.microsoft.com/sharepoint/v3"/>
+    <ds:schemaRef ds:uri="http://purl.org/dc/dcmitype/"/>
+    <ds:schemaRef ds:uri="http://purl.org/dc/elements/1.1/"/>
+    <ds:schemaRef ds:uri="http://purl.org/dc/terms/"/>
+    <ds:schemaRef ds:uri="http://schemas.microsoft.com/office/infopath/2007/PartnerControls"/>
+    <ds:schemaRef ds:uri="http://schemas.microsoft.com/office/2006/metadata/properties"/>
+    <ds:schemaRef ds:uri="http://www.w3.org/XML/1998/namespace"/>
+    <ds:schemaRef ds:uri="http://schemas.openxmlformats.org/package/2006/metadata/core-properties"/>
+    <ds:schemaRef ds:uri="230e9df3-be65-4c73-a93b-d1236ebd677e"/>
+    <ds:schemaRef ds:uri="16c05727-aa75-4e4a-9b5f-8a80a1165891"/>
+    <ds:schemaRef ds:uri="71af3243-3dd4-4a8d-8c0d-dd76da1f02a5"/>
+  </ds:schemaRefs>
+</ds:datastoreItem>
+</file>
+
+<file path=customXml/itemProps2.xml><?xml version="1.0" encoding="utf-8"?>
 <ds:datastoreItem xmlns:ds="http://schemas.openxmlformats.org/officeDocument/2006/customXml" ds:itemID="{797783A8-901D-4F73-81D7-AA6841BEB3D7}">
   <ds:schemaRefs>
     <ds:schemaRef ds:uri="http://schemas.microsoft.com/office/2006/metadata/contentType"/>
@@ -20819,25 +20949,6 @@
 </ds:datastoreItem>
 </file>
 
-<file path=customXml/itemProps2.xml><?xml version="1.0" encoding="utf-8"?>
-<ds:datastoreItem xmlns:ds="http://schemas.openxmlformats.org/officeDocument/2006/customXml" ds:itemID="{1F342EE1-43E5-4AFB-895D-B61B9656DC14}">
-  <ds:schemaRefs>
-    <ds:schemaRef ds:uri="http://schemas.microsoft.com/office/2006/documentManagement/types"/>
-    <ds:schemaRef ds:uri="http://schemas.microsoft.com/sharepoint/v3"/>
-    <ds:schemaRef ds:uri="http://purl.org/dc/dcmitype/"/>
-    <ds:schemaRef ds:uri="http://purl.org/dc/elements/1.1/"/>
-    <ds:schemaRef ds:uri="http://purl.org/dc/terms/"/>
-    <ds:schemaRef ds:uri="http://schemas.microsoft.com/office/infopath/2007/PartnerControls"/>
-    <ds:schemaRef ds:uri="http://schemas.microsoft.com/office/2006/metadata/properties"/>
-    <ds:schemaRef ds:uri="http://www.w3.org/XML/1998/namespace"/>
-    <ds:schemaRef ds:uri="http://schemas.openxmlformats.org/package/2006/metadata/core-properties"/>
-    <ds:schemaRef ds:uri="230e9df3-be65-4c73-a93b-d1236ebd677e"/>
-    <ds:schemaRef ds:uri="16c05727-aa75-4e4a-9b5f-8a80a1165891"/>
-    <ds:schemaRef ds:uri="71af3243-3dd4-4a8d-8c0d-dd76da1f02a5"/>
-  </ds:schemaRefs>
-</ds:datastoreItem>
-</file>
-
 <file path=customXml/itemProps3.xml><?xml version="1.0" encoding="utf-8"?>
 <ds:datastoreItem xmlns:ds="http://schemas.openxmlformats.org/officeDocument/2006/customXml" ds:itemID="{2F49CD38-5B57-4682-9FCE-B9174068D0AE}">
   <ds:schemaRefs>
